--- a/classes/parte-11-devsecops-y-seguridad-del-sdlc/238-sast-analisis-estatico-de-codigo/clase-238-presentacion.pptx
+++ b/classes/parte-11-devsecops-y-seguridad-del-sdlc/238-sast-analisis-estatico-de-codigo/clase-238-presentacion.pptx
@@ -17,6 +17,10 @@
     <p:sldId id="265" r:id="rId16"/>
     <p:sldId id="266" r:id="rId17"/>
     <p:sldId id="267" r:id="rId18"/>
+    <p:sldId id="268" r:id="rId19"/>
+    <p:sldId id="269" r:id="rId20"/>
+    <p:sldId id="270" r:id="rId21"/>
+    <p:sldId id="271" r:id="rId22"/>
   </p:sldIdLst>
   <p:sldSz cx="9144000" cy="6858000" type="screen4x3"/>
   <p:notesSz cx="6858000" cy="9144000"/>
@@ -3198,7 +3202,7 @@
                   <a:srgbClr val="0B3D2E"/>
                 </a:solidFill>
               </a:rPr>
-              <a:t>⚠️ Errores comunes</a:t>
+              <a:t>🧪 Laboratorio guiado</a:t>
             </a:r>
           </a:p>
         </p:txBody>
@@ -3236,67 +3240,97 @@
                   <a:srgbClr val="22282E"/>
                 </a:solidFill>
               </a:rPr>
-              <a:t>•  El equipo ignora los reportes de SAST — Demasiados falsos positivos. Afina reglas, usa diff-aware y calibra severidades.</a:t>
-            </a:r>
-          </a:p>
-          <a:p>
-            <a:pPr>
-              <a:spcAft>
-                <a:spcPts val="600"/>
-              </a:spcAft>
-            </a:pPr>
-            <a:r>
-              <a:rPr sz="1500">
-                <a:solidFill>
-                  <a:srgbClr val="22282E"/>
-                </a:solidFill>
-              </a:rPr>
-              <a:t>•  El escaneo tarda 40 minutos — Analizas todo el monorepo cada vez. Usa semgrep ci diff-aware y excluye vendor/.</a:t>
-            </a:r>
-          </a:p>
-          <a:p>
-            <a:pPr>
-              <a:spcAft>
-                <a:spcPts val="600"/>
-              </a:spcAft>
-            </a:pPr>
-            <a:r>
-              <a:rPr sz="1500">
-                <a:solidFill>
-                  <a:srgbClr val="22282E"/>
-                </a:solidFill>
-              </a:rPr>
-              <a:t>•  semgrep no detecta una inyección obvia — El flujo cruza archivos o frameworks no soportados. Añade una regla con taint o usa una herramienta con más profundidad.</a:t>
-            </a:r>
-          </a:p>
-          <a:p>
-            <a:pPr>
-              <a:spcAft>
-                <a:spcPts val="600"/>
-              </a:spcAft>
-            </a:pPr>
-            <a:r>
-              <a:rPr sz="1500">
-                <a:solidFill>
-                  <a:srgbClr val="22282E"/>
-                </a:solidFill>
-              </a:rPr>
-              <a:t>•  Reglas propias no matchean nada — Metavariables o sintaxis del pattern incorrectas. Prueba en semgrep.dev/playground.</a:t>
-            </a:r>
-          </a:p>
-          <a:p>
-            <a:pPr>
-              <a:spcAft>
-                <a:spcPts val="600"/>
-              </a:spcAft>
-            </a:pPr>
-            <a:r>
-              <a:rPr sz="1500">
-                <a:solidFill>
-                  <a:srgbClr val="22282E"/>
-                </a:solidFill>
-              </a:rPr>
-              <a:t>•  Se rompe el build por deuda histórica — No usaste baseline. Establece un baseline y bloquea solo lo nuevo.</a:t>
+              <a:t>•  Clona un repo vulnerable de práctica (p. ej. NodeGoat) en tu entorno local.</a:t>
+            </a:r>
+          </a:p>
+          <a:p>
+            <a:pPr>
+              <a:spcAft>
+                <a:spcPts val="600"/>
+              </a:spcAft>
+            </a:pPr>
+            <a:r>
+              <a:rPr sz="1500">
+                <a:solidFill>
+                  <a:srgbClr val="22282E"/>
+                </a:solidFill>
+              </a:rPr>
+              <a:t>•  Escanea con reglas de la comunidad:</a:t>
+            </a:r>
+          </a:p>
+          <a:p>
+            <a:pPr>
+              <a:spcAft>
+                <a:spcPts val="600"/>
+              </a:spcAft>
+            </a:pPr>
+            <a:r>
+              <a:rPr sz="1500">
+                <a:solidFill>
+                  <a:srgbClr val="22282E"/>
+                </a:solidFill>
+              </a:rPr>
+              <a:t>•  Interpreta un hallazgo. Elige una inyección SQL o un XSS reportado, abre el archivo/línea y confirma si el flujo source→sink es real.</a:t>
+            </a:r>
+          </a:p>
+          <a:p>
+            <a:pPr>
+              <a:spcAft>
+                <a:spcPts val="600"/>
+              </a:spcAft>
+            </a:pPr>
+            <a:r>
+              <a:rPr sz="1500">
+                <a:solidFill>
+                  <a:srgbClr val="22282E"/>
+                </a:solidFill>
+              </a:rPr>
+              <a:t>•  Escribe una regla propia. Detecta uso de md5 para contraseñas:</a:t>
+            </a:r>
+          </a:p>
+          <a:p>
+            <a:pPr>
+              <a:spcAft>
+                <a:spcPts val="600"/>
+              </a:spcAft>
+            </a:pPr>
+            <a:r>
+              <a:rPr sz="1500">
+                <a:solidFill>
+                  <a:srgbClr val="22282E"/>
+                </a:solidFill>
+              </a:rPr>
+              <a:t>•  Ejecuta semgrep --config mi-regla.yml ./codigo.</a:t>
+            </a:r>
+          </a:p>
+          <a:p>
+            <a:pPr>
+              <a:spcAft>
+                <a:spcPts val="600"/>
+              </a:spcAft>
+            </a:pPr>
+            <a:r>
+              <a:rPr sz="1500">
+                <a:solidFill>
+                  <a:srgbClr val="22282E"/>
+                </a:solidFill>
+              </a:rPr>
+              <a:t>•  Configura diff-aware. En CI, escanea solo el cambio contra la rama base:</a:t>
+            </a:r>
+          </a:p>
+          <a:p>
+            <a:pPr>
+              <a:spcAft>
+                <a:spcPts val="600"/>
+              </a:spcAft>
+            </a:pPr>
+            <a:r>
+              <a:rPr sz="1500">
+                <a:solidFill>
+                  <a:srgbClr val="22282E"/>
+                </a:solidFill>
+              </a:rPr>
+              <a:t>•  Triage. Clasifica 5 hallazgos como verdadero positivo, falso positivo o riesgo aceptado. Suprime un falso positivo con un comentario # nosemgrep: &lt;id&gt; justificado.</a:t>
             </a:r>
           </a:p>
         </p:txBody>
@@ -3347,7 +3381,7 @@
                   <a:srgbClr val="0B3D2E"/>
                 </a:solidFill>
               </a:rPr>
-              <a:t>❓ Preguntas frecuentes</a:t>
+              <a:t>✍️ Ejercicios</a:t>
             </a:r>
           </a:p>
         </p:txBody>
@@ -3385,97 +3419,82 @@
                   <a:srgbClr val="22282E"/>
                 </a:solidFill>
               </a:rPr>
-              <a:t>•  ❓ ¿SAST reemplaza la revisión de código humana?</a:t>
-            </a:r>
-          </a:p>
-          <a:p>
-            <a:pPr>
-              <a:spcAft>
-                <a:spcPts val="600"/>
-              </a:spcAft>
-            </a:pPr>
-            <a:r>
-              <a:rPr sz="1500">
-                <a:solidFill>
-                  <a:srgbClr val="22282E"/>
-                </a:solidFill>
-              </a:rPr>
-              <a:t>•  No. Automatiza la detección de patrones conocidos, pero el juicio sobre lógica de negocio, autorización y diseño sigue necesitando ojos humanos.</a:t>
-            </a:r>
-          </a:p>
-          <a:p>
-            <a:pPr>
-              <a:spcAft>
-                <a:spcPts val="600"/>
-              </a:spcAft>
-            </a:pPr>
-            <a:r>
-              <a:rPr sz="1500">
-                <a:solidFill>
-                  <a:srgbClr val="22282E"/>
-                </a:solidFill>
-              </a:rPr>
-              <a:t>•  ❓ ¿Por qué Semgrep y no un SAST comercial?</a:t>
-            </a:r>
-          </a:p>
-          <a:p>
-            <a:pPr>
-              <a:spcAft>
-                <a:spcPts val="600"/>
-              </a:spcAft>
-            </a:pPr>
-            <a:r>
-              <a:rPr sz="1500">
-                <a:solidFill>
-                  <a:srgbClr val="22282E"/>
-                </a:solidFill>
-              </a:rPr>
-              <a:t>•  Semgrep es rápido, sus reglas son legibles y personalizables, y su versión OSS cubre la mayoría de casos. Los comerciales aportan más profundidad interprocedural pero a mayor coste y ruido.</a:t>
-            </a:r>
-          </a:p>
-          <a:p>
-            <a:pPr>
-              <a:spcAft>
-                <a:spcPts val="600"/>
-              </a:spcAft>
-            </a:pPr>
-            <a:r>
-              <a:rPr sz="1500">
-                <a:solidFill>
-                  <a:srgbClr val="22282E"/>
-                </a:solidFill>
-              </a:rPr>
-              <a:t>•  ❓ ¿Cómo evito que SAST frene los despliegues?</a:t>
-            </a:r>
-          </a:p>
-          <a:p>
-            <a:pPr>
-              <a:spcAft>
-                <a:spcPts val="600"/>
-              </a:spcAft>
-            </a:pPr>
-            <a:r>
-              <a:rPr sz="1500">
-                <a:solidFill>
-                  <a:srgbClr val="22282E"/>
-                </a:solidFill>
-              </a:rPr>
-              <a:t>•  Escanea en modo diff-aware, rompe solo por severidad alta, y trata la deuda histórica con baseline en vez de bloquear todo.</a:t>
-            </a:r>
-          </a:p>
-          <a:p>
-            <a:pPr>
-              <a:spcAft>
-                <a:spcPts val="600"/>
-              </a:spcAft>
-            </a:pPr>
-            <a:r>
-              <a:rPr sz="1500">
-                <a:solidFill>
-                  <a:srgbClr val="22282E"/>
-                </a:solidFill>
-              </a:rPr>
-              <a:t>•  ❓ ¿SAST detecta secretos en el código?</a:t>
+              <a:t>•  Ejecuta Semgrep con dos rulesets distintos y compara los hallazgos.</a:t>
+            </a:r>
+          </a:p>
+          <a:p>
+            <a:pPr>
+              <a:spcAft>
+                <a:spcPts val="600"/>
+              </a:spcAft>
+            </a:pPr>
+            <a:r>
+              <a:rPr sz="1500">
+                <a:solidFill>
+                  <a:srgbClr val="22282E"/>
+                </a:solidFill>
+              </a:rPr>
+              <a:t>•  Escribe una regla que detecte eval() sobre input de usuario en JavaScript.</a:t>
+            </a:r>
+          </a:p>
+          <a:p>
+            <a:pPr>
+              <a:spcAft>
+                <a:spcPts val="600"/>
+              </a:spcAft>
+            </a:pPr>
+            <a:r>
+              <a:rPr sz="1500">
+                <a:solidFill>
+                  <a:srgbClr val="22282E"/>
+                </a:solidFill>
+              </a:rPr>
+              <a:t>•  Identifica un falso positivo real y justifica su supresión.</a:t>
+            </a:r>
+          </a:p>
+          <a:p>
+            <a:pPr>
+              <a:spcAft>
+                <a:spcPts val="600"/>
+              </a:spcAft>
+            </a:pPr>
+            <a:r>
+              <a:rPr sz="1500">
+                <a:solidFill>
+                  <a:srgbClr val="22282E"/>
+                </a:solidFill>
+              </a:rPr>
+              <a:t>•  Configura Semgrep para escanear solo el diff de un PR.</a:t>
+            </a:r>
+          </a:p>
+          <a:p>
+            <a:pPr>
+              <a:spcAft>
+                <a:spcPts val="600"/>
+              </a:spcAft>
+            </a:pPr>
+            <a:r>
+              <a:rPr sz="1500">
+                <a:solidFill>
+                  <a:srgbClr val="22282E"/>
+                </a:solidFill>
+              </a:rPr>
+              <a:t>•  Compara la cobertura de Bandit vs Semgrep sobre el mismo código Python.</a:t>
+            </a:r>
+          </a:p>
+          <a:p>
+            <a:pPr>
+              <a:spcAft>
+                <a:spcPts val="600"/>
+              </a:spcAft>
+            </a:pPr>
+            <a:r>
+              <a:rPr sz="1500">
+                <a:solidFill>
+                  <a:srgbClr val="22282E"/>
+                </a:solidFill>
+              </a:rPr>
+              <a:t>•  Define una política de severidades (qué rompe, qué avisa) y documéntala.</a:t>
             </a:r>
           </a:p>
         </p:txBody>
@@ -3526,7 +3545,7 @@
                   <a:srgbClr val="0B3D2E"/>
                 </a:solidFill>
               </a:rPr>
-              <a:t>🔗 Referencias</a:t>
+              <a:t>📝 Reto verificable</a:t>
             </a:r>
           </a:p>
         </p:txBody>
@@ -3564,6 +3583,483 @@
                   <a:srgbClr val="22282E"/>
                 </a:solidFill>
               </a:rPr>
+              <a:t>•  Integra SAST en un repositorio con una regla personalizada y un gate de CI funcional.</a:t>
+            </a:r>
+          </a:p>
+          <a:p>
+            <a:pPr>
+              <a:spcAft>
+                <a:spcPts val="600"/>
+              </a:spcAft>
+            </a:pPr>
+            <a:r>
+              <a:rPr sz="1500">
+                <a:solidFill>
+                  <a:srgbClr val="22282E"/>
+                </a:solidFill>
+              </a:rPr>
+              <a:t>•  Criterio de aceptación: (a) Semgrep corre en CI en cada PR en modo diff-aware; (b) existe</a:t>
+            </a:r>
+          </a:p>
+          <a:p>
+            <a:pPr>
+              <a:spcAft>
+                <a:spcPts val="600"/>
+              </a:spcAft>
+            </a:pPr>
+            <a:r>
+              <a:rPr sz="1500">
+                <a:solidFill>
+                  <a:srgbClr val="22282E"/>
+                </a:solidFill>
+              </a:rPr>
+              <a:t>•  al menos una regla personalizada propia que detecta un patrón real; (c) los hallazgos de</a:t>
+            </a:r>
+          </a:p>
+          <a:p>
+            <a:pPr>
+              <a:spcAft>
+                <a:spcPts val="600"/>
+              </a:spcAft>
+            </a:pPr>
+            <a:r>
+              <a:rPr sz="1500">
+                <a:solidFill>
+                  <a:srgbClr val="22282E"/>
+                </a:solidFill>
+              </a:rPr>
+              <a:t>•  severidad ERROR rompen el build y los WARNING solo avisan; (d) hay al menos un falso positivo</a:t>
+            </a:r>
+          </a:p>
+          <a:p>
+            <a:pPr>
+              <a:spcAft>
+                <a:spcPts val="600"/>
+              </a:spcAft>
+            </a:pPr>
+            <a:r>
+              <a:rPr sz="1500">
+                <a:solidFill>
+                  <a:srgbClr val="22282E"/>
+                </a:solidFill>
+              </a:rPr>
+              <a:t>•  triado y suprimido con justificación documentada.</a:t>
+            </a:r>
+          </a:p>
+        </p:txBody>
+      </p:sp>
+    </p:spTree>
+  </p:cSld>
+  <p:clrMapOvr>
+    <a:masterClrMapping/>
+  </p:clrMapOvr>
+</p:sld>
+</file>
+
+<file path=ppt/slides/slide13.xml><?xml version="1.0" encoding="utf-8"?>
+<p:sld xmlns:a="http://schemas.openxmlformats.org/drawingml/2006/main" xmlns:p="http://schemas.openxmlformats.org/presentationml/2006/main" xmlns:r="http://schemas.openxmlformats.org/officeDocument/2006/relationships">
+  <p:cSld>
+    <p:spTree>
+      <p:nvGrpSpPr>
+        <p:cNvPr id="1" name=""/>
+        <p:cNvGrpSpPr/>
+        <p:nvPr/>
+      </p:nvGrpSpPr>
+      <p:grpSpPr/>
+      <p:sp>
+        <p:nvSpPr>
+          <p:cNvPr id="2" name="TextBox 1"/>
+          <p:cNvSpPr txBox="1"/>
+          <p:nvPr/>
+        </p:nvSpPr>
+        <p:spPr>
+          <a:xfrm>
+            <a:off x="457200" y="320040"/>
+            <a:ext cx="8229600" cy="822960"/>
+          </a:xfrm>
+          <a:prstGeom prst="rect">
+            <a:avLst/>
+          </a:prstGeom>
+          <a:noFill/>
+        </p:spPr>
+        <p:txBody>
+          <a:bodyPr wrap="square">
+            <a:spAutoFit/>
+          </a:bodyPr>
+          <a:lstStyle/>
+          <a:p>
+            <a:r>
+              <a:rPr sz="2600" b="1">
+                <a:solidFill>
+                  <a:srgbClr val="0B3D2E"/>
+                </a:solidFill>
+              </a:rPr>
+              <a:t>⚠️ Errores comunes</a:t>
+            </a:r>
+          </a:p>
+        </p:txBody>
+      </p:sp>
+      <p:sp>
+        <p:nvSpPr>
+          <p:cNvPr id="3" name="TextBox 2"/>
+          <p:cNvSpPr txBox="1"/>
+          <p:nvPr/>
+        </p:nvSpPr>
+        <p:spPr>
+          <a:xfrm>
+            <a:off x="457200" y="1280160"/>
+            <a:ext cx="8229600" cy="4937760"/>
+          </a:xfrm>
+          <a:prstGeom prst="rect">
+            <a:avLst/>
+          </a:prstGeom>
+          <a:noFill/>
+        </p:spPr>
+        <p:txBody>
+          <a:bodyPr wrap="square">
+            <a:spAutoFit/>
+          </a:bodyPr>
+          <a:lstStyle/>
+          <a:p>
+            <a:pPr>
+              <a:spcAft>
+                <a:spcPts val="600"/>
+              </a:spcAft>
+            </a:pPr>
+            <a:r>
+              <a:rPr sz="1500">
+                <a:solidFill>
+                  <a:srgbClr val="22282E"/>
+                </a:solidFill>
+              </a:rPr>
+              <a:t>•  El equipo ignora los reportes de SAST — Demasiados falsos positivos. Afina reglas, usa diff-aware y calibra severidades.</a:t>
+            </a:r>
+          </a:p>
+          <a:p>
+            <a:pPr>
+              <a:spcAft>
+                <a:spcPts val="600"/>
+              </a:spcAft>
+            </a:pPr>
+            <a:r>
+              <a:rPr sz="1500">
+                <a:solidFill>
+                  <a:srgbClr val="22282E"/>
+                </a:solidFill>
+              </a:rPr>
+              <a:t>•  El escaneo tarda 40 minutos — Analizas todo el monorepo cada vez. Usa semgrep ci diff-aware y excluye vendor/.</a:t>
+            </a:r>
+          </a:p>
+          <a:p>
+            <a:pPr>
+              <a:spcAft>
+                <a:spcPts val="600"/>
+              </a:spcAft>
+            </a:pPr>
+            <a:r>
+              <a:rPr sz="1500">
+                <a:solidFill>
+                  <a:srgbClr val="22282E"/>
+                </a:solidFill>
+              </a:rPr>
+              <a:t>•  semgrep no detecta una inyección obvia — El flujo cruza archivos o frameworks no soportados. Añade una regla con taint o usa una herramienta con más profundidad.</a:t>
+            </a:r>
+          </a:p>
+          <a:p>
+            <a:pPr>
+              <a:spcAft>
+                <a:spcPts val="600"/>
+              </a:spcAft>
+            </a:pPr>
+            <a:r>
+              <a:rPr sz="1500">
+                <a:solidFill>
+                  <a:srgbClr val="22282E"/>
+                </a:solidFill>
+              </a:rPr>
+              <a:t>•  Reglas propias no matchean nada — Metavariables o sintaxis del pattern incorrectas. Prueba en semgrep.dev/playground.</a:t>
+            </a:r>
+          </a:p>
+          <a:p>
+            <a:pPr>
+              <a:spcAft>
+                <a:spcPts val="600"/>
+              </a:spcAft>
+            </a:pPr>
+            <a:r>
+              <a:rPr sz="1500">
+                <a:solidFill>
+                  <a:srgbClr val="22282E"/>
+                </a:solidFill>
+              </a:rPr>
+              <a:t>•  Se rompe el build por deuda histórica — No usaste baseline. Establece un baseline y bloquea solo lo nuevo.</a:t>
+            </a:r>
+          </a:p>
+        </p:txBody>
+      </p:sp>
+    </p:spTree>
+  </p:cSld>
+  <p:clrMapOvr>
+    <a:masterClrMapping/>
+  </p:clrMapOvr>
+</p:sld>
+</file>
+
+<file path=ppt/slides/slide14.xml><?xml version="1.0" encoding="utf-8"?>
+<p:sld xmlns:a="http://schemas.openxmlformats.org/drawingml/2006/main" xmlns:p="http://schemas.openxmlformats.org/presentationml/2006/main" xmlns:r="http://schemas.openxmlformats.org/officeDocument/2006/relationships">
+  <p:cSld>
+    <p:spTree>
+      <p:nvGrpSpPr>
+        <p:cNvPr id="1" name=""/>
+        <p:cNvGrpSpPr/>
+        <p:nvPr/>
+      </p:nvGrpSpPr>
+      <p:grpSpPr/>
+      <p:sp>
+        <p:nvSpPr>
+          <p:cNvPr id="2" name="TextBox 1"/>
+          <p:cNvSpPr txBox="1"/>
+          <p:nvPr/>
+        </p:nvSpPr>
+        <p:spPr>
+          <a:xfrm>
+            <a:off x="457200" y="320040"/>
+            <a:ext cx="8229600" cy="822960"/>
+          </a:xfrm>
+          <a:prstGeom prst="rect">
+            <a:avLst/>
+          </a:prstGeom>
+          <a:noFill/>
+        </p:spPr>
+        <p:txBody>
+          <a:bodyPr wrap="square">
+            <a:spAutoFit/>
+          </a:bodyPr>
+          <a:lstStyle/>
+          <a:p>
+            <a:r>
+              <a:rPr sz="2600" b="1">
+                <a:solidFill>
+                  <a:srgbClr val="0B3D2E"/>
+                </a:solidFill>
+              </a:rPr>
+              <a:t>❓ Preguntas frecuentes</a:t>
+            </a:r>
+          </a:p>
+        </p:txBody>
+      </p:sp>
+      <p:sp>
+        <p:nvSpPr>
+          <p:cNvPr id="3" name="TextBox 2"/>
+          <p:cNvSpPr txBox="1"/>
+          <p:nvPr/>
+        </p:nvSpPr>
+        <p:spPr>
+          <a:xfrm>
+            <a:off x="457200" y="1280160"/>
+            <a:ext cx="8229600" cy="4937760"/>
+          </a:xfrm>
+          <a:prstGeom prst="rect">
+            <a:avLst/>
+          </a:prstGeom>
+          <a:noFill/>
+        </p:spPr>
+        <p:txBody>
+          <a:bodyPr wrap="square">
+            <a:spAutoFit/>
+          </a:bodyPr>
+          <a:lstStyle/>
+          <a:p>
+            <a:pPr>
+              <a:spcAft>
+                <a:spcPts val="600"/>
+              </a:spcAft>
+            </a:pPr>
+            <a:r>
+              <a:rPr sz="1500">
+                <a:solidFill>
+                  <a:srgbClr val="22282E"/>
+                </a:solidFill>
+              </a:rPr>
+              <a:t>•  ❓ ¿SAST reemplaza la revisión de código humana?</a:t>
+            </a:r>
+          </a:p>
+          <a:p>
+            <a:pPr>
+              <a:spcAft>
+                <a:spcPts val="600"/>
+              </a:spcAft>
+            </a:pPr>
+            <a:r>
+              <a:rPr sz="1500">
+                <a:solidFill>
+                  <a:srgbClr val="22282E"/>
+                </a:solidFill>
+              </a:rPr>
+              <a:t>•  No. Automatiza la detección de patrones conocidos, pero el juicio sobre lógica de negocio, autorización y diseño sigue necesitando ojos humanos.</a:t>
+            </a:r>
+          </a:p>
+          <a:p>
+            <a:pPr>
+              <a:spcAft>
+                <a:spcPts val="600"/>
+              </a:spcAft>
+            </a:pPr>
+            <a:r>
+              <a:rPr sz="1500">
+                <a:solidFill>
+                  <a:srgbClr val="22282E"/>
+                </a:solidFill>
+              </a:rPr>
+              <a:t>•  ❓ ¿Por qué Semgrep y no un SAST comercial?</a:t>
+            </a:r>
+          </a:p>
+          <a:p>
+            <a:pPr>
+              <a:spcAft>
+                <a:spcPts val="600"/>
+              </a:spcAft>
+            </a:pPr>
+            <a:r>
+              <a:rPr sz="1500">
+                <a:solidFill>
+                  <a:srgbClr val="22282E"/>
+                </a:solidFill>
+              </a:rPr>
+              <a:t>•  Semgrep es rápido, sus reglas son legibles y personalizables, y su versión OSS cubre la mayoría de casos. Los comerciales aportan más profundidad interprocedural pero a mayor coste y ruido.</a:t>
+            </a:r>
+          </a:p>
+          <a:p>
+            <a:pPr>
+              <a:spcAft>
+                <a:spcPts val="600"/>
+              </a:spcAft>
+            </a:pPr>
+            <a:r>
+              <a:rPr sz="1500">
+                <a:solidFill>
+                  <a:srgbClr val="22282E"/>
+                </a:solidFill>
+              </a:rPr>
+              <a:t>•  ❓ ¿Cómo evito que SAST frene los despliegues?</a:t>
+            </a:r>
+          </a:p>
+          <a:p>
+            <a:pPr>
+              <a:spcAft>
+                <a:spcPts val="600"/>
+              </a:spcAft>
+            </a:pPr>
+            <a:r>
+              <a:rPr sz="1500">
+                <a:solidFill>
+                  <a:srgbClr val="22282E"/>
+                </a:solidFill>
+              </a:rPr>
+              <a:t>•  Escanea en modo diff-aware, rompe solo por severidad alta, y trata la deuda histórica con baseline en vez de bloquear todo.</a:t>
+            </a:r>
+          </a:p>
+          <a:p>
+            <a:pPr>
+              <a:spcAft>
+                <a:spcPts val="600"/>
+              </a:spcAft>
+            </a:pPr>
+            <a:r>
+              <a:rPr sz="1500">
+                <a:solidFill>
+                  <a:srgbClr val="22282E"/>
+                </a:solidFill>
+              </a:rPr>
+              <a:t>•  ❓ ¿SAST detecta secretos en el código?</a:t>
+            </a:r>
+          </a:p>
+        </p:txBody>
+      </p:sp>
+    </p:spTree>
+  </p:cSld>
+  <p:clrMapOvr>
+    <a:masterClrMapping/>
+  </p:clrMapOvr>
+</p:sld>
+</file>
+
+<file path=ppt/slides/slide15.xml><?xml version="1.0" encoding="utf-8"?>
+<p:sld xmlns:a="http://schemas.openxmlformats.org/drawingml/2006/main" xmlns:p="http://schemas.openxmlformats.org/presentationml/2006/main" xmlns:r="http://schemas.openxmlformats.org/officeDocument/2006/relationships">
+  <p:cSld>
+    <p:spTree>
+      <p:nvGrpSpPr>
+        <p:cNvPr id="1" name=""/>
+        <p:cNvGrpSpPr/>
+        <p:nvPr/>
+      </p:nvGrpSpPr>
+      <p:grpSpPr/>
+      <p:sp>
+        <p:nvSpPr>
+          <p:cNvPr id="2" name="TextBox 1"/>
+          <p:cNvSpPr txBox="1"/>
+          <p:nvPr/>
+        </p:nvSpPr>
+        <p:spPr>
+          <a:xfrm>
+            <a:off x="457200" y="320040"/>
+            <a:ext cx="8229600" cy="822960"/>
+          </a:xfrm>
+          <a:prstGeom prst="rect">
+            <a:avLst/>
+          </a:prstGeom>
+          <a:noFill/>
+        </p:spPr>
+        <p:txBody>
+          <a:bodyPr wrap="square">
+            <a:spAutoFit/>
+          </a:bodyPr>
+          <a:lstStyle/>
+          <a:p>
+            <a:r>
+              <a:rPr sz="2600" b="1">
+                <a:solidFill>
+                  <a:srgbClr val="0B3D2E"/>
+                </a:solidFill>
+              </a:rPr>
+              <a:t>🔗 Referencias</a:t>
+            </a:r>
+          </a:p>
+        </p:txBody>
+      </p:sp>
+      <p:sp>
+        <p:nvSpPr>
+          <p:cNvPr id="3" name="TextBox 2"/>
+          <p:cNvSpPr txBox="1"/>
+          <p:nvPr/>
+        </p:nvSpPr>
+        <p:spPr>
+          <a:xfrm>
+            <a:off x="457200" y="1280160"/>
+            <a:ext cx="8229600" cy="4937760"/>
+          </a:xfrm>
+          <a:prstGeom prst="rect">
+            <a:avLst/>
+          </a:prstGeom>
+          <a:noFill/>
+        </p:spPr>
+        <p:txBody>
+          <a:bodyPr wrap="square">
+            <a:spAutoFit/>
+          </a:bodyPr>
+          <a:lstStyle/>
+          <a:p>
+            <a:pPr>
+              <a:spcAft>
+                <a:spcPts val="600"/>
+              </a:spcAft>
+            </a:pPr>
+            <a:r>
+              <a:rPr sz="1500">
+                <a:solidFill>
+                  <a:srgbClr val="22282E"/>
+                </a:solidFill>
+              </a:rPr>
               <a:t>•  Semgrep docs — &lt;https://semgrep.dev/docs/&gt;</a:t>
             </a:r>
           </a:p>
@@ -3629,6 +4125,81 @@
           </a:p>
         </p:txBody>
       </p:sp>
+    </p:spTree>
+  </p:cSld>
+  <p:clrMapOvr>
+    <a:masterClrMapping/>
+  </p:clrMapOvr>
+</p:sld>
+</file>
+
+<file path=ppt/slides/slide16.xml><?xml version="1.0" encoding="utf-8"?>
+<p:sld xmlns:a="http://schemas.openxmlformats.org/drawingml/2006/main" xmlns:p="http://schemas.openxmlformats.org/presentationml/2006/main" xmlns:r="http://schemas.openxmlformats.org/officeDocument/2006/relationships">
+  <p:cSld>
+    <p:spTree>
+      <p:nvGrpSpPr>
+        <p:cNvPr id="1" name=""/>
+        <p:cNvGrpSpPr/>
+        <p:nvPr/>
+      </p:nvGrpSpPr>
+      <p:grpSpPr/>
+      <p:sp>
+        <p:nvSpPr>
+          <p:cNvPr id="2" name="TextBox 1"/>
+          <p:cNvSpPr txBox="1"/>
+          <p:nvPr/>
+        </p:nvSpPr>
+        <p:spPr>
+          <a:xfrm>
+            <a:off x="457200" y="274320"/>
+            <a:ext cx="8229600" cy="640080"/>
+          </a:xfrm>
+          <a:prstGeom prst="rect">
+            <a:avLst/>
+          </a:prstGeom>
+          <a:noFill/>
+        </p:spPr>
+        <p:txBody>
+          <a:bodyPr wrap="square">
+            <a:spAutoFit/>
+          </a:bodyPr>
+          <a:lstStyle/>
+          <a:p>
+            <a:r>
+              <a:rPr sz="2200" b="1">
+                <a:solidFill>
+                  <a:srgbClr val="0B3D2E"/>
+                </a:solidFill>
+              </a:rPr>
+              <a:t>Diagrama de la clase</a:t>
+            </a:r>
+          </a:p>
+        </p:txBody>
+      </p:sp>
+      <p:pic>
+        <p:nvPicPr>
+          <p:cNvPr id="3" name="Picture 2" descr="6256af6b593f0601.png"/>
+          <p:cNvPicPr>
+            <a:picLocks noChangeAspect="1"/>
+          </p:cNvPicPr>
+          <p:nvPr/>
+        </p:nvPicPr>
+        <p:blipFill>
+          <a:blip r:embed="rId2"/>
+          <a:stretch>
+            <a:fillRect/>
+          </a:stretch>
+        </p:blipFill>
+        <p:spPr>
+          <a:xfrm>
+            <a:off x="457200" y="3008376"/>
+            <a:ext cx="8229600" cy="1481328"/>
+          </a:xfrm>
+          <a:prstGeom prst="rect">
+            <a:avLst/>
+          </a:prstGeom>
+        </p:spPr>
+      </p:pic>
     </p:spTree>
   </p:cSld>
   <p:clrMapOvr>
@@ -4167,7 +4738,7 @@
                   <a:srgbClr val="0B3D2E"/>
                 </a:solidFill>
               </a:rPr>
-              <a:t>📖 Definiciones y características</a:t>
+              <a:t>🧠 Explicación en profundidad</a:t>
             </a:r>
           </a:p>
         </p:txBody>
@@ -4205,82 +4776,82 @@
                   <a:srgbClr val="22282E"/>
                 </a:solidFill>
               </a:rPr>
-              <a:t>•  SAST: análisis del código sin ejecutarlo. Característica: cobertura de todo el código, incluidas rutas no ejecutadas; ciego a configuración y runtime.</a:t>
-            </a:r>
-          </a:p>
-          <a:p>
-            <a:pPr>
-              <a:spcAft>
-                <a:spcPts val="600"/>
-              </a:spcAft>
-            </a:pPr>
-            <a:r>
-              <a:rPr sz="1500">
-                <a:solidFill>
-                  <a:srgbClr val="22282E"/>
-                </a:solidFill>
-              </a:rPr>
-              <a:t>•  AST (árbol de sintaxis abstracta): representación estructural del código. Característica: permite buscar patrones sintácticos con precisión.</a:t>
-            </a:r>
-          </a:p>
-          <a:p>
-            <a:pPr>
-              <a:spcAft>
-                <a:spcPts val="600"/>
-              </a:spcAft>
-            </a:pPr>
-            <a:r>
-              <a:rPr sz="1500">
-                <a:solidFill>
-                  <a:srgbClr val="22282E"/>
-                </a:solidFill>
-              </a:rPr>
-              <a:t>•  Taint analysis: seguimiento de datos no confiables (source) hasta operaciones peligrosas (sink). Característica: detecta inyecciones al ver que input llega a un sink sin sanitización.</a:t>
-            </a:r>
-          </a:p>
-          <a:p>
-            <a:pPr>
-              <a:spcAft>
-                <a:spcPts val="600"/>
-              </a:spcAft>
-            </a:pPr>
-            <a:r>
-              <a:rPr sz="1500">
-                <a:solidFill>
-                  <a:srgbClr val="22282E"/>
-                </a:solidFill>
-              </a:rPr>
-              <a:t>•  Falso positivo: hallazgo reportado que no es explotable. Característica: erosiona la confianza; hay que triarlo y suprimirlo con justificación.</a:t>
-            </a:r>
-          </a:p>
-          <a:p>
-            <a:pPr>
-              <a:spcAft>
-                <a:spcPts val="600"/>
-              </a:spcAft>
-            </a:pPr>
-            <a:r>
-              <a:rPr sz="1500">
-                <a:solidFill>
-                  <a:srgbClr val="22282E"/>
-                </a:solidFill>
-              </a:rPr>
-              <a:t>•  Ruleset: conjunto de reglas (p. ej. p/owasp-top-ten). Característica: reutilizable y versionable.</a:t>
-            </a:r>
-          </a:p>
-          <a:p>
-            <a:pPr>
-              <a:spcAft>
-                <a:spcPts val="600"/>
-              </a:spcAft>
-            </a:pPr>
-            <a:r>
-              <a:rPr sz="1500">
-                <a:solidFill>
-                  <a:srgbClr val="22282E"/>
-                </a:solidFill>
-              </a:rPr>
-              <a:t>•  Baseline / diff-aware: escanear solo el código cambiado. Característica: evita frenar por deuda histórica; enfoca en lo nuevo.</a:t>
+              <a:t>•  SAST examina una representación del programa sin necesitar que la aplicación esté atendiendo peticiones. Una regla textual busca patrones locales; un analizador sintáctico entiende el árbol del…</a:t>
+            </a:r>
+          </a:p>
+          <a:p>
+            <a:pPr>
+              <a:spcAft>
+                <a:spcPts val="600"/>
+              </a:spcAft>
+            </a:pPr>
+            <a:r>
+              <a:rPr sz="1500">
+                <a:solidFill>
+                  <a:srgbClr val="22282E"/>
+                </a:solidFill>
+              </a:rPr>
+              <a:t>•  El diagrama muestra por qué buscar la palabra execute no basta. El mismo método puede recibir una consulta parametrizada o una cadena concatenada. El motor necesita comprender el flujo y las…</a:t>
+            </a:r>
+          </a:p>
+          <a:p>
+            <a:pPr>
+              <a:spcAft>
+                <a:spcPts val="600"/>
+              </a:spcAft>
+            </a:pPr>
+            <a:r>
+              <a:rPr sz="1500">
+                <a:solidFill>
+                  <a:srgbClr val="22282E"/>
+                </a:solidFill>
+              </a:rPr>
+              <a:t>•  Un resultado útil identifica regla, ubicación, flujo, CWE relacionada, confianza y forma de remediación. La severidad genérica es solo el inicio. El equipo debe preguntar si la ruta se compila y…</a:t>
+            </a:r>
+          </a:p>
+          <a:p>
+            <a:pPr>
+              <a:spcAft>
+                <a:spcPts val="600"/>
+              </a:spcAft>
+            </a:pPr>
+            <a:r>
+              <a:rPr sz="1500">
+                <a:solidFill>
+                  <a:srgbClr val="22282E"/>
+                </a:solidFill>
+              </a:rPr>
+              <a:t>•  En integración continua conviene diferenciar deuda existente de cambios nuevos. Una línea base permite informar lo heredado y bloquear regresiones en el diff. Las reglas de alta confianza pueden…</a:t>
+            </a:r>
+          </a:p>
+          <a:p>
+            <a:pPr>
+              <a:spcAft>
+                <a:spcPts val="600"/>
+              </a:spcAft>
+            </a:pPr>
+            <a:r>
+              <a:rPr sz="1500">
+                <a:solidFill>
+                  <a:srgbClr val="22282E"/>
+                </a:solidFill>
+              </a:rPr>
+              <a:t>•  Para crear una regla se parte de una propiedad: «ninguna entrada HTTP llega a subprocess con shell=True». Después se construyen casos positivos y negativos, se contempla propagación entre funciones y…</a:t>
+            </a:r>
+          </a:p>
+          <a:p>
+            <a:pPr>
+              <a:spcAft>
+                <a:spcPts val="600"/>
+              </a:spcAft>
+            </a:pPr>
+            <a:r>
+              <a:rPr sz="1500">
+                <a:solidFill>
+                  <a:srgbClr val="22282E"/>
+                </a:solidFill>
+              </a:rPr>
+              <a:t>•  Semgrep marca una llamada a cursor.execute(query, params). Al inspeccionar el flujo, query es una constante y los datos externos viajan en params; el driver realiza parametrización. No se suprime…</a:t>
             </a:r>
           </a:p>
         </p:txBody>
@@ -4331,7 +4902,7 @@
                   <a:srgbClr val="0B3D2E"/>
                 </a:solidFill>
               </a:rPr>
-              <a:t>🧰 Herramientas y preparación</a:t>
+              <a:t>📔 Glosario operativo</a:t>
             </a:r>
           </a:p>
         </p:txBody>
@@ -4369,97 +4940,97 @@
                   <a:srgbClr val="22282E"/>
                 </a:solidFill>
               </a:rPr>
-              <a:t>•  Semgrep (open source) — motor principal.</a:t>
-            </a:r>
-          </a:p>
-          <a:p>
-            <a:pPr>
-              <a:spcAft>
-                <a:spcPts val="600"/>
-              </a:spcAft>
-            </a:pPr>
-            <a:r>
-              <a:rPr sz="1500">
-                <a:solidFill>
-                  <a:srgbClr val="22282E"/>
-                </a:solidFill>
-              </a:rPr>
-              <a:t>•  Bandit (Python) y gosec (Go) como SAST específicos de lenguaje.</a:t>
-            </a:r>
-          </a:p>
-          <a:p>
-            <a:pPr>
-              <a:spcAft>
-                <a:spcPts val="600"/>
-              </a:spcAft>
-            </a:pPr>
-            <a:r>
-              <a:rPr sz="1500">
-                <a:solidFill>
-                  <a:srgbClr val="22282E"/>
-                </a:solidFill>
-              </a:rPr>
-              <a:t>•  Un repositorio vulnerable de práctica: OWASP Juice Shop o NodeGoat o el intencionadamente inseguro DVWA.</a:t>
-            </a:r>
-          </a:p>
-          <a:p>
-            <a:pPr>
-              <a:spcAft>
-                <a:spcPts val="600"/>
-              </a:spcAft>
-            </a:pPr>
-            <a:r>
-              <a:rPr sz="1500">
-                <a:solidFill>
-                  <a:srgbClr val="22282E"/>
-                </a:solidFill>
-              </a:rPr>
-              <a:t>•  Instalación:</a:t>
-            </a:r>
-          </a:p>
-          <a:p>
-            <a:pPr>
-              <a:spcAft>
-                <a:spcPts val="600"/>
-              </a:spcAft>
-            </a:pPr>
-            <a:r>
-              <a:rPr sz="1500">
-                <a:solidFill>
-                  <a:srgbClr val="22282E"/>
-                </a:solidFill>
-              </a:rPr>
-              <a:t>•  pip install semgrep        # o brew install semgrep</a:t>
-            </a:r>
-          </a:p>
-          <a:p>
-            <a:pPr>
-              <a:spcAft>
-                <a:spcPts val="600"/>
-              </a:spcAft>
-            </a:pPr>
-            <a:r>
-              <a:rPr sz="1500">
-                <a:solidFill>
-                  <a:srgbClr val="22282E"/>
-                </a:solidFill>
-              </a:rPr>
-              <a:t>•  semgrep --version</a:t>
-            </a:r>
-          </a:p>
-          <a:p>
-            <a:pPr>
-              <a:spcAft>
-                <a:spcPts val="600"/>
-              </a:spcAft>
-            </a:pPr>
-            <a:r>
-              <a:rPr sz="1500">
-                <a:solidFill>
-                  <a:srgbClr val="22282E"/>
-                </a:solidFill>
-              </a:rPr>
-              <a:t>•  semgrep --config auto ./mi-repo</a:t>
+              <a:t>•  Término — Definición útil</a:t>
+            </a:r>
+          </a:p>
+          <a:p>
+            <a:pPr>
+              <a:spcAft>
+                <a:spcPts val="600"/>
+              </a:spcAft>
+            </a:pPr>
+            <a:r>
+              <a:rPr sz="1500">
+                <a:solidFill>
+                  <a:srgbClr val="22282E"/>
+                </a:solidFill>
+              </a:rPr>
+              <a:t>•  AST — Árbol que representa la estructura sintáctica del código.</a:t>
+            </a:r>
+          </a:p>
+          <a:p>
+            <a:pPr>
+              <a:spcAft>
+                <a:spcPts val="600"/>
+              </a:spcAft>
+            </a:pPr>
+            <a:r>
+              <a:rPr sz="1500">
+                <a:solidFill>
+                  <a:srgbClr val="22282E"/>
+                </a:solidFill>
+              </a:rPr>
+              <a:t>•  Fuente — Origen potencial de datos no confiables.</a:t>
+            </a:r>
+          </a:p>
+          <a:p>
+            <a:pPr>
+              <a:spcAft>
+                <a:spcPts val="600"/>
+              </a:spcAft>
+            </a:pPr>
+            <a:r>
+              <a:rPr sz="1500">
+                <a:solidFill>
+                  <a:srgbClr val="22282E"/>
+                </a:solidFill>
+              </a:rPr>
+              <a:t>•  Sumidero — Operación sensible que puede convertir esos datos en impacto.</a:t>
+            </a:r>
+          </a:p>
+          <a:p>
+            <a:pPr>
+              <a:spcAft>
+                <a:spcPts val="600"/>
+              </a:spcAft>
+            </a:pPr>
+            <a:r>
+              <a:rPr sz="1500">
+                <a:solidFill>
+                  <a:srgbClr val="22282E"/>
+                </a:solidFill>
+              </a:rPr>
+              <a:t>•  Sanitizador — Transformación válida para un contexto específico; no es universal.</a:t>
+            </a:r>
+          </a:p>
+          <a:p>
+            <a:pPr>
+              <a:spcAft>
+                <a:spcPts val="600"/>
+              </a:spcAft>
+            </a:pPr>
+            <a:r>
+              <a:rPr sz="1500">
+                <a:solidFill>
+                  <a:srgbClr val="22282E"/>
+                </a:solidFill>
+              </a:rPr>
+              <a:t>•  Taint analysis — Seguimiento de datos desde fuentes hasta sumideros.</a:t>
+            </a:r>
+          </a:p>
+          <a:p>
+            <a:pPr>
+              <a:spcAft>
+                <a:spcPts val="600"/>
+              </a:spcAft>
+            </a:pPr>
+            <a:r>
+              <a:rPr sz="1500">
+                <a:solidFill>
+                  <a:srgbClr val="22282E"/>
+                </a:solidFill>
+              </a:rPr>
+              <a:t>•  Línea base — Conjunto heredado que se gestiona sin permitir nuevos hallazgos equivalentes.</a:t>
             </a:r>
           </a:p>
         </p:txBody>
@@ -4510,7 +5081,7 @@
                   <a:srgbClr val="0B3D2E"/>
                 </a:solidFill>
               </a:rPr>
-              <a:t>🧪 Laboratorio guiado</a:t>
+              <a:t>✅ Criterio de dominio</a:t>
             </a:r>
           </a:p>
         </p:txBody>
@@ -4548,97 +5119,7 @@
                   <a:srgbClr val="22282E"/>
                 </a:solidFill>
               </a:rPr>
-              <a:t>•  Clona un repo vulnerable de práctica (p. ej. NodeGoat) en tu entorno local.</a:t>
-            </a:r>
-          </a:p>
-          <a:p>
-            <a:pPr>
-              <a:spcAft>
-                <a:spcPts val="600"/>
-              </a:spcAft>
-            </a:pPr>
-            <a:r>
-              <a:rPr sz="1500">
-                <a:solidFill>
-                  <a:srgbClr val="22282E"/>
-                </a:solidFill>
-              </a:rPr>
-              <a:t>•  Escanea con reglas de la comunidad:</a:t>
-            </a:r>
-          </a:p>
-          <a:p>
-            <a:pPr>
-              <a:spcAft>
-                <a:spcPts val="600"/>
-              </a:spcAft>
-            </a:pPr>
-            <a:r>
-              <a:rPr sz="1500">
-                <a:solidFill>
-                  <a:srgbClr val="22282E"/>
-                </a:solidFill>
-              </a:rPr>
-              <a:t>•  semgrep --config p/owasp-top-ten --config p/secrets ./NodeGoat --json -o hallazgos.json</a:t>
-            </a:r>
-          </a:p>
-          <a:p>
-            <a:pPr>
-              <a:spcAft>
-                <a:spcPts val="600"/>
-              </a:spcAft>
-            </a:pPr>
-            <a:r>
-              <a:rPr sz="1500">
-                <a:solidFill>
-                  <a:srgbClr val="22282E"/>
-                </a:solidFill>
-              </a:rPr>
-              <a:t>•  semgrep --config p/owasp-top-ten ./NodeGoat   # salida legible en consola</a:t>
-            </a:r>
-          </a:p>
-          <a:p>
-            <a:pPr>
-              <a:spcAft>
-                <a:spcPts val="600"/>
-              </a:spcAft>
-            </a:pPr>
-            <a:r>
-              <a:rPr sz="1500">
-                <a:solidFill>
-                  <a:srgbClr val="22282E"/>
-                </a:solidFill>
-              </a:rPr>
-              <a:t>•  Interpreta un hallazgo. Elige una inyección SQL o un XSS reportado, abre el archivo/línea y confirma si el flujo source→sink es real.</a:t>
-            </a:r>
-          </a:p>
-          <a:p>
-            <a:pPr>
-              <a:spcAft>
-                <a:spcPts val="600"/>
-              </a:spcAft>
-            </a:pPr>
-            <a:r>
-              <a:rPr sz="1500">
-                <a:solidFill>
-                  <a:srgbClr val="22282E"/>
-                </a:solidFill>
-              </a:rPr>
-              <a:t>•  Escribe una regla propia. Detecta uso de md5 para contraseñas:</a:t>
-            </a:r>
-          </a:p>
-          <a:p>
-            <a:pPr>
-              <a:spcAft>
-                <a:spcPts val="600"/>
-              </a:spcAft>
-            </a:pPr>
-            <a:r>
-              <a:rPr sz="1500">
-                <a:solidFill>
-                  <a:srgbClr val="22282E"/>
-                </a:solidFill>
-              </a:rPr>
-              <a:t>•  rules:</a:t>
+              <a:t>•  Existe dominio cuando el alumno puede explicar la ruta de un hallazgo, reproducirlo o descartarlo con evidencia, escoger una corrección contextual, escribir pruebas positivas y negativas para una…</a:t>
             </a:r>
           </a:p>
         </p:txBody>
@@ -4689,7 +5170,7 @@
                   <a:srgbClr val="0B3D2E"/>
                 </a:solidFill>
               </a:rPr>
-              <a:t>✍️ Ejercicios</a:t>
+              <a:t>📖 Definiciones y características</a:t>
             </a:r>
           </a:p>
         </p:txBody>
@@ -4727,82 +5208,82 @@
                   <a:srgbClr val="22282E"/>
                 </a:solidFill>
               </a:rPr>
-              <a:t>•  Ejecuta Semgrep con dos rulesets distintos y compara los hallazgos.</a:t>
-            </a:r>
-          </a:p>
-          <a:p>
-            <a:pPr>
-              <a:spcAft>
-                <a:spcPts val="600"/>
-              </a:spcAft>
-            </a:pPr>
-            <a:r>
-              <a:rPr sz="1500">
-                <a:solidFill>
-                  <a:srgbClr val="22282E"/>
-                </a:solidFill>
-              </a:rPr>
-              <a:t>•  Escribe una regla que detecte eval() sobre input de usuario en JavaScript.</a:t>
-            </a:r>
-          </a:p>
-          <a:p>
-            <a:pPr>
-              <a:spcAft>
-                <a:spcPts val="600"/>
-              </a:spcAft>
-            </a:pPr>
-            <a:r>
-              <a:rPr sz="1500">
-                <a:solidFill>
-                  <a:srgbClr val="22282E"/>
-                </a:solidFill>
-              </a:rPr>
-              <a:t>•  Identifica un falso positivo real y justifica su supresión.</a:t>
-            </a:r>
-          </a:p>
-          <a:p>
-            <a:pPr>
-              <a:spcAft>
-                <a:spcPts val="600"/>
-              </a:spcAft>
-            </a:pPr>
-            <a:r>
-              <a:rPr sz="1500">
-                <a:solidFill>
-                  <a:srgbClr val="22282E"/>
-                </a:solidFill>
-              </a:rPr>
-              <a:t>•  Configura Semgrep para escanear solo el diff de un PR.</a:t>
-            </a:r>
-          </a:p>
-          <a:p>
-            <a:pPr>
-              <a:spcAft>
-                <a:spcPts val="600"/>
-              </a:spcAft>
-            </a:pPr>
-            <a:r>
-              <a:rPr sz="1500">
-                <a:solidFill>
-                  <a:srgbClr val="22282E"/>
-                </a:solidFill>
-              </a:rPr>
-              <a:t>•  Compara la cobertura de Bandit vs Semgrep sobre el mismo código Python.</a:t>
-            </a:r>
-          </a:p>
-          <a:p>
-            <a:pPr>
-              <a:spcAft>
-                <a:spcPts val="600"/>
-              </a:spcAft>
-            </a:pPr>
-            <a:r>
-              <a:rPr sz="1500">
-                <a:solidFill>
-                  <a:srgbClr val="22282E"/>
-                </a:solidFill>
-              </a:rPr>
-              <a:t>•  Define una política de severidades (qué rompe, qué avisa) y documéntala.</a:t>
+              <a:t>•  SAST: análisis del código sin ejecutarlo. Característica: cobertura de todo el código, incluidas rutas no ejecutadas; ciego a configuración y runtime.</a:t>
+            </a:r>
+          </a:p>
+          <a:p>
+            <a:pPr>
+              <a:spcAft>
+                <a:spcPts val="600"/>
+              </a:spcAft>
+            </a:pPr>
+            <a:r>
+              <a:rPr sz="1500">
+                <a:solidFill>
+                  <a:srgbClr val="22282E"/>
+                </a:solidFill>
+              </a:rPr>
+              <a:t>•  AST (árbol de sintaxis abstracta): representación estructural del código. Característica: permite buscar patrones sintácticos con precisión.</a:t>
+            </a:r>
+          </a:p>
+          <a:p>
+            <a:pPr>
+              <a:spcAft>
+                <a:spcPts val="600"/>
+              </a:spcAft>
+            </a:pPr>
+            <a:r>
+              <a:rPr sz="1500">
+                <a:solidFill>
+                  <a:srgbClr val="22282E"/>
+                </a:solidFill>
+              </a:rPr>
+              <a:t>•  Taint analysis: seguimiento de datos no confiables (source) hasta operaciones peligrosas (sink). Característica: detecta inyecciones al ver que input llega a un sink sin sanitización.</a:t>
+            </a:r>
+          </a:p>
+          <a:p>
+            <a:pPr>
+              <a:spcAft>
+                <a:spcPts val="600"/>
+              </a:spcAft>
+            </a:pPr>
+            <a:r>
+              <a:rPr sz="1500">
+                <a:solidFill>
+                  <a:srgbClr val="22282E"/>
+                </a:solidFill>
+              </a:rPr>
+              <a:t>•  Falso positivo: hallazgo reportado que no es explotable. Característica: erosiona la confianza; hay que triarlo y suprimirlo con justificación.</a:t>
+            </a:r>
+          </a:p>
+          <a:p>
+            <a:pPr>
+              <a:spcAft>
+                <a:spcPts val="600"/>
+              </a:spcAft>
+            </a:pPr>
+            <a:r>
+              <a:rPr sz="1500">
+                <a:solidFill>
+                  <a:srgbClr val="22282E"/>
+                </a:solidFill>
+              </a:rPr>
+              <a:t>•  Ruleset: conjunto de reglas (p. ej. p/owasp-top-ten). Característica: reutilizable y versionable.</a:t>
+            </a:r>
+          </a:p>
+          <a:p>
+            <a:pPr>
+              <a:spcAft>
+                <a:spcPts val="600"/>
+              </a:spcAft>
+            </a:pPr>
+            <a:r>
+              <a:rPr sz="1500">
+                <a:solidFill>
+                  <a:srgbClr val="22282E"/>
+                </a:solidFill>
+              </a:rPr>
+              <a:t>•  Baseline / diff-aware: escanear solo el código cambiado. Característica: evita frenar por deuda histórica; enfoca en lo nuevo.</a:t>
             </a:r>
           </a:p>
         </p:txBody>
@@ -4853,7 +5334,7 @@
                   <a:srgbClr val="0B3D2E"/>
                 </a:solidFill>
               </a:rPr>
-              <a:t>📝 Reto verificable</a:t>
+              <a:t>🧰 Herramientas y preparación</a:t>
             </a:r>
           </a:p>
         </p:txBody>
@@ -4891,67 +5372,52 @@
                   <a:srgbClr val="22282E"/>
                 </a:solidFill>
               </a:rPr>
-              <a:t>•  Integra SAST en un repositorio con una regla personalizada y un gate de CI funcional.</a:t>
-            </a:r>
-          </a:p>
-          <a:p>
-            <a:pPr>
-              <a:spcAft>
-                <a:spcPts val="600"/>
-              </a:spcAft>
-            </a:pPr>
-            <a:r>
-              <a:rPr sz="1500">
-                <a:solidFill>
-                  <a:srgbClr val="22282E"/>
-                </a:solidFill>
-              </a:rPr>
-              <a:t>•  Criterio de aceptación: (a) Semgrep corre en CI en cada PR en modo diff-aware; (b) existe</a:t>
-            </a:r>
-          </a:p>
-          <a:p>
-            <a:pPr>
-              <a:spcAft>
-                <a:spcPts val="600"/>
-              </a:spcAft>
-            </a:pPr>
-            <a:r>
-              <a:rPr sz="1500">
-                <a:solidFill>
-                  <a:srgbClr val="22282E"/>
-                </a:solidFill>
-              </a:rPr>
-              <a:t>•  al menos una regla personalizada propia que detecta un patrón real; (c) los hallazgos de</a:t>
-            </a:r>
-          </a:p>
-          <a:p>
-            <a:pPr>
-              <a:spcAft>
-                <a:spcPts val="600"/>
-              </a:spcAft>
-            </a:pPr>
-            <a:r>
-              <a:rPr sz="1500">
-                <a:solidFill>
-                  <a:srgbClr val="22282E"/>
-                </a:solidFill>
-              </a:rPr>
-              <a:t>•  severidad ERROR rompen el build y los WARNING solo avisan; (d) hay al menos un falso positivo</a:t>
-            </a:r>
-          </a:p>
-          <a:p>
-            <a:pPr>
-              <a:spcAft>
-                <a:spcPts val="600"/>
-              </a:spcAft>
-            </a:pPr>
-            <a:r>
-              <a:rPr sz="1500">
-                <a:solidFill>
-                  <a:srgbClr val="22282E"/>
-                </a:solidFill>
-              </a:rPr>
-              <a:t>•  triado y suprimido con justificación documentada.</a:t>
+              <a:t>•  Semgrep (open source) — motor principal.</a:t>
+            </a:r>
+          </a:p>
+          <a:p>
+            <a:pPr>
+              <a:spcAft>
+                <a:spcPts val="600"/>
+              </a:spcAft>
+            </a:pPr>
+            <a:r>
+              <a:rPr sz="1500">
+                <a:solidFill>
+                  <a:srgbClr val="22282E"/>
+                </a:solidFill>
+              </a:rPr>
+              <a:t>•  Bandit (Python) y gosec (Go) como SAST específicos de lenguaje.</a:t>
+            </a:r>
+          </a:p>
+          <a:p>
+            <a:pPr>
+              <a:spcAft>
+                <a:spcPts val="600"/>
+              </a:spcAft>
+            </a:pPr>
+            <a:r>
+              <a:rPr sz="1500">
+                <a:solidFill>
+                  <a:srgbClr val="22282E"/>
+                </a:solidFill>
+              </a:rPr>
+              <a:t>•  Un repositorio vulnerable de práctica: OWASP Juice Shop o NodeGoat o el intencionadamente inseguro DVWA.</a:t>
+            </a:r>
+          </a:p>
+          <a:p>
+            <a:pPr>
+              <a:spcAft>
+                <a:spcPts val="600"/>
+              </a:spcAft>
+            </a:pPr>
+            <a:r>
+              <a:rPr sz="1500">
+                <a:solidFill>
+                  <a:srgbClr val="22282E"/>
+                </a:solidFill>
+              </a:rPr>
+              <a:t>•  Instalación:</a:t>
             </a:r>
           </a:p>
         </p:txBody>
